--- a/media/exports/reports/2026-02/growth-services.pptx
+++ b/media/exports/reports/2026-02/growth-services.pptx
@@ -225,55 +225,55 @@
                 <c:formatCode>$#,##0;[Red]($#,##0);"-"</c:formatCode>
                 <c:ptCount val="17"/>
                 <c:pt idx="0">
-                  <c:v>94520</c:v>
+                  <c:v>103550</c:v>
                 </c:pt>
                 <c:pt idx="1">
-                  <c:v>108140</c:v>
+                  <c:v>118390</c:v>
                 </c:pt>
                 <c:pt idx="2">
-                  <c:v>114895</c:v>
+                  <c:v>125715</c:v>
                 </c:pt>
                 <c:pt idx="3">
-                  <c:v>88250</c:v>
+                  <c:v>96560</c:v>
                 </c:pt>
                 <c:pt idx="4">
-                  <c:v>111010</c:v>
+                  <c:v>121275</c:v>
                 </c:pt>
                 <c:pt idx="5">
-                  <c:v>77175</c:v>
+                  <c:v>84340</c:v>
                 </c:pt>
                 <c:pt idx="6">
-                  <c:v>63970</c:v>
+                  <c:v>69985</c:v>
                 </c:pt>
                 <c:pt idx="7">
-                  <c:v>95555</c:v>
+                  <c:v>104970</c:v>
                 </c:pt>
                 <c:pt idx="8">
-                  <c:v>90220</c:v>
+                  <c:v>99060</c:v>
                 </c:pt>
                 <c:pt idx="9">
-                  <c:v>86320</c:v>
+                  <c:v>94805</c:v>
                 </c:pt>
                 <c:pt idx="10">
-                  <c:v>61475</c:v>
+                  <c:v>67745</c:v>
                 </c:pt>
                 <c:pt idx="11">
-                  <c:v>59535</c:v>
+                  <c:v>65650</c:v>
                 </c:pt>
                 <c:pt idx="12">
-                  <c:v>71260</c:v>
+                  <c:v>78550</c:v>
                 </c:pt>
                 <c:pt idx="13">
-                  <c:v>83940</c:v>
+                  <c:v>92575</c:v>
                 </c:pt>
                 <c:pt idx="14">
-                  <c:v>69420</c:v>
+                  <c:v>76600</c:v>
                 </c:pt>
                 <c:pt idx="15">
-                  <c:v>92370</c:v>
+                  <c:v>102350</c:v>
                 </c:pt>
                 <c:pt idx="16">
-                  <c:v>100055</c:v>
+                  <c:v>110835</c:v>
                 </c:pt>
               </c:numCache>
             </c:numRef>
@@ -322,7 +322,7 @@
         <c:axId val="-2100718248"/>
         <c:scaling>
           <c:orientation val="minMax"/>
-          <c:max val="125000.0"/>
+          <c:max val="150000.0"/>
           <c:min val="0.0"/>
         </c:scaling>
         <c:delete val="0"/>
@@ -357,7 +357,7 @@
         <c:crossAx val="-2101159928"/>
         <c:crosses val="autoZero"/>
         <c:crossBetween val="midCat"/>
-        <c:majorUnit val="25000.0"/>
+        <c:majorUnit val="50000.0"/>
       </c:valAx>
     </c:plotArea>
     <c:plotVisOnly val="1"/>
@@ -495,55 +495,55 @@
                 <c:formatCode>$#,##0;[Red]($#,##0);"-"</c:formatCode>
                 <c:ptCount val="17"/>
                 <c:pt idx="0">
-                  <c:v>70720</c:v>
+                  <c:v>77350</c:v>
                 </c:pt>
                 <c:pt idx="1">
-                  <c:v>88540</c:v>
+                  <c:v>96790</c:v>
                 </c:pt>
                 <c:pt idx="2">
-                  <c:v>94695</c:v>
+                  <c:v>103515</c:v>
                 </c:pt>
                 <c:pt idx="3">
-                  <c:v>66850</c:v>
+                  <c:v>73060</c:v>
                 </c:pt>
                 <c:pt idx="4">
-                  <c:v>84410</c:v>
+                  <c:v>92075</c:v>
                 </c:pt>
                 <c:pt idx="5">
-                  <c:v>48975</c:v>
+                  <c:v>53340</c:v>
                 </c:pt>
                 <c:pt idx="6">
-                  <c:v>37570</c:v>
+                  <c:v>40885</c:v>
                 </c:pt>
                 <c:pt idx="7">
-                  <c:v>59755</c:v>
+                  <c:v>65570</c:v>
                 </c:pt>
                 <c:pt idx="8">
-                  <c:v>64520</c:v>
+                  <c:v>70760</c:v>
                 </c:pt>
                 <c:pt idx="9">
-                  <c:v>64820</c:v>
+                  <c:v>71205</c:v>
                 </c:pt>
                 <c:pt idx="10">
-                  <c:v>38775</c:v>
+                  <c:v>42845</c:v>
                 </c:pt>
                 <c:pt idx="11">
-                  <c:v>38035</c:v>
+                  <c:v>42050</c:v>
                 </c:pt>
                 <c:pt idx="12">
-                  <c:v>45860</c:v>
+                  <c:v>50650</c:v>
                 </c:pt>
                 <c:pt idx="13">
-                  <c:v>46840</c:v>
+                  <c:v>51775</c:v>
                 </c:pt>
                 <c:pt idx="14">
-                  <c:v>29520</c:v>
+                  <c:v>32800</c:v>
                 </c:pt>
                 <c:pt idx="15">
-                  <c:v>60170</c:v>
+                  <c:v>66950</c:v>
                 </c:pt>
                 <c:pt idx="16">
-                  <c:v>62955</c:v>
+                  <c:v>70035</c:v>
                 </c:pt>
               </c:numCache>
             </c:numRef>
@@ -592,7 +592,7 @@
         <c:axId val="-2100718248"/>
         <c:scaling>
           <c:orientation val="minMax"/>
-          <c:max val="100000.0"/>
+          <c:max val="125000.0"/>
           <c:min val="0.0"/>
         </c:scaling>
         <c:delete val="0"/>
@@ -627,7 +627,7 @@
         <c:crossAx val="-2101159928"/>
         <c:crosses val="autoZero"/>
         <c:crossBetween val="midCat"/>
-        <c:majorUnit val="20000.0"/>
+        <c:majorUnit val="25000.0"/>
       </c:valAx>
     </c:plotArea>
     <c:plotVisOnly val="1"/>
@@ -765,55 +765,55 @@
                 <c:formatCode>$#,##0;[Red]($#,##0);"-"</c:formatCode>
                 <c:ptCount val="17"/>
                 <c:pt idx="0">
-                  <c:v>15000</c:v>
+                  <c:v>16500</c:v>
                 </c:pt>
                 <c:pt idx="1">
-                  <c:v>15000</c:v>
+                  <c:v>16500</c:v>
                 </c:pt>
                 <c:pt idx="2">
-                  <c:v>15000</c:v>
+                  <c:v>16500</c:v>
                 </c:pt>
                 <c:pt idx="3">
-                  <c:v>15000</c:v>
+                  <c:v>16500</c:v>
                 </c:pt>
                 <c:pt idx="4">
-                  <c:v>15000</c:v>
+                  <c:v>16500</c:v>
                 </c:pt>
                 <c:pt idx="5">
-                  <c:v>21800</c:v>
+                  <c:v>24000</c:v>
                 </c:pt>
                 <c:pt idx="6">
-                  <c:v>21800</c:v>
+                  <c:v>24000</c:v>
                 </c:pt>
                 <c:pt idx="7">
-                  <c:v>21800</c:v>
+                  <c:v>24000</c:v>
                 </c:pt>
                 <c:pt idx="8">
-                  <c:v>21800</c:v>
+                  <c:v>24000</c:v>
                 </c:pt>
                 <c:pt idx="9">
-                  <c:v>16300</c:v>
+                  <c:v>17900</c:v>
                 </c:pt>
                 <c:pt idx="10">
-                  <c:v>16300</c:v>
+                  <c:v>17900</c:v>
                 </c:pt>
                 <c:pt idx="11">
-                  <c:v>16300</c:v>
+                  <c:v>17900</c:v>
                 </c:pt>
                 <c:pt idx="12">
-                  <c:v>16300</c:v>
+                  <c:v>17900</c:v>
                 </c:pt>
                 <c:pt idx="13">
-                  <c:v>28300</c:v>
+                  <c:v>31100</c:v>
                 </c:pt>
                 <c:pt idx="14">
-                  <c:v>28300</c:v>
+                  <c:v>31100</c:v>
                 </c:pt>
                 <c:pt idx="15">
-                  <c:v>28300</c:v>
+                  <c:v>31100</c:v>
                 </c:pt>
                 <c:pt idx="16">
-                  <c:v>28300</c:v>
+                  <c:v>31100</c:v>
                 </c:pt>
               </c:numCache>
             </c:numRef>
@@ -862,7 +862,7 @@
         <c:axId val="-2100718248"/>
         <c:scaling>
           <c:orientation val="minMax"/>
-          <c:max val="30000.0"/>
+          <c:max val="40000.0"/>
           <c:min val="0.0"/>
         </c:scaling>
         <c:delete val="0"/>
@@ -1035,55 +1035,55 @@
                 <c:formatCode>$#,##0;[Red]($#,##0);"-"</c:formatCode>
                 <c:ptCount val="17"/>
                 <c:pt idx="0">
-                  <c:v>8800</c:v>
+                  <c:v>9700</c:v>
                 </c:pt>
                 <c:pt idx="1">
-                  <c:v>4600</c:v>
+                  <c:v>5100</c:v>
                 </c:pt>
                 <c:pt idx="2">
-                  <c:v>5200</c:v>
+                  <c:v>5700</c:v>
                 </c:pt>
                 <c:pt idx="3">
-                  <c:v>6400</c:v>
+                  <c:v>7000</c:v>
                 </c:pt>
                 <c:pt idx="4">
-                  <c:v>11600</c:v>
+                  <c:v>12700</c:v>
                 </c:pt>
                 <c:pt idx="5">
-                  <c:v>6400</c:v>
+                  <c:v>7000</c:v>
                 </c:pt>
                 <c:pt idx="6">
-                  <c:v>4600</c:v>
+                  <c:v>5100</c:v>
                 </c:pt>
                 <c:pt idx="7">
-                  <c:v>14000</c:v>
+                  <c:v>15400</c:v>
                 </c:pt>
                 <c:pt idx="8">
-                  <c:v>3900</c:v>
+                  <c:v>4300</c:v>
                 </c:pt>
                 <c:pt idx="9">
-                  <c:v>5200</c:v>
+                  <c:v>5700</c:v>
                 </c:pt>
                 <c:pt idx="10">
-                  <c:v>6400</c:v>
+                  <c:v>7000</c:v>
                 </c:pt>
                 <c:pt idx="11">
-                  <c:v>5200</c:v>
+                  <c:v>5700</c:v>
                 </c:pt>
                 <c:pt idx="12">
-                  <c:v>9100</c:v>
+                  <c:v>10000</c:v>
                 </c:pt>
                 <c:pt idx="13">
-                  <c:v>8800</c:v>
+                  <c:v>9700</c:v>
                 </c:pt>
                 <c:pt idx="14">
-                  <c:v>11600</c:v>
+                  <c:v>12700</c:v>
                 </c:pt>
                 <c:pt idx="15">
-                  <c:v>3900</c:v>
+                  <c:v>4300</c:v>
                 </c:pt>
                 <c:pt idx="16">
-                  <c:v>8800</c:v>
+                  <c:v>9700</c:v>
                 </c:pt>
               </c:numCache>
             </c:numRef>
@@ -1132,7 +1132,7 @@
         <c:axId val="-2100718248"/>
         <c:scaling>
           <c:orientation val="minMax"/>
-          <c:max val="15000.0"/>
+          <c:max val="20000.0"/>
           <c:min val="0.0"/>
         </c:scaling>
         <c:delete val="0"/>
@@ -1657,7 +1657,7 @@
           <a:lstStyle/>
           <a:p>
             <a:r>
-              <a:t>Services · All. February against February last year: (9.9%); Year to date (Jul to Feb 2026): $624,375; Gross margin, year to date: 64.0%. Revenue is $624,375 this financial year to date (Jul to Feb 2026). Training makes the highest gross margin (74.8%); Projects the lowest (61.6%). The business needs 56.7% gross margin just to cover overheads. Projects: 61.6% gross margin, 21.6 points over the 40.0% target ($83,445 ahead on $386,975 this financial year to date). Training: 74.8% gross margin, 34.8 points over the 40.0% target ($20,520 ahead on $59,000 this financial year to date).</a:t>
+              <a:t>Services · All. February against February last year: (8.6%); Year to date (Jul to Feb 2026): $689,110; Gross margin, year to date: 67.4%. Revenue is $689,110 this financial year to date (Jul to Feb 2026). Training makes the highest gross margin (77.0%); Projects the lowest (65.3%). The business needs 57.4% gross margin just to cover overheads. Projects: 65.3% gross margin, 25.3 points over the 40.0% target ($108,246 ahead on $428,310 this financial year to date). Training: 77.0% gross margin, 37.0 points over the 40.0% target ($24,000 ahead on $64,800 this financial year to date).</a:t>
             </a:r>
           </a:p>
         </p:txBody>
@@ -1727,7 +1727,7 @@
           <a:lstStyle/>
           <a:p>
             <a:r>
-              <a:t>Services · Projects. February against February last year: (25.4%); Year to date (Jul to Feb 2026): $386,975; Gross margin, year to date: 61.6%. Projects brought in $386,975 this financial year to date, at a 61.6% gross margin (below the 64.0% overall). Projects: 61.6% gross margin, 21.6 points over the 40.0% target ($83,445 ahead on $386,975 this financial year to date).</a:t>
+              <a:t>Services · Projects. February against February last year: (23.9%); Year to date (Jul to Feb 2026): $428,310; Gross margin, year to date: 65.3%. Projects brought in $428,310 this financial year to date, at a 65.3% gross margin (below the 67.4% overall). Projects: 65.3% gross margin, 25.3 points over the 40.0% target ($108,246 ahead on $428,310 this financial year to date).</a:t>
             </a:r>
           </a:p>
         </p:txBody>
@@ -1797,7 +1797,7 @@
           <a:lstStyle/>
           <a:p>
             <a:r>
-              <a:t>Services · Retainers. February against February last year: 88.7%; Year to date (Jul to Feb 2026): $178,400; Gross margin, year to date: 65.7%. Retainers brought in $178,400 this financial year to date, at a 65.7% gross margin (above the 64.0% overall). Retainers: 65.7% gross margin, 25.7 points over the 40.0% target ($45,900 ahead on $178,400 this financial year to date).</a:t>
+              <a:t>Services · Retainers. February against February last year: 88.5%; Year to date (Jul to Feb 2026): $196,000; Gross margin, year to date: 68.8%. Retainers brought in $196,000 this financial year to date, at a 68.8% gross margin (above the 67.4% overall). Retainers: 68.8% gross margin, 28.8 points over the 40.0% target ($56,460 ahead on $196,000 this financial year to date).</a:t>
             </a:r>
           </a:p>
         </p:txBody>
@@ -1867,7 +1867,7 @@
           <a:lstStyle/>
           <a:p>
             <a:r>
-              <a:t>Services · Training. February against February last year: (24.1%); Year to date (Jul to Feb 2026): $59,000; Gross margin, year to date: 74.8%. Training brought in $59,000 this financial year to date, at a 74.8% gross margin (above the 64.0% overall). Training: 74.8% gross margin, 34.8 points over the 40.0% target ($20,520 ahead on $59,000 this financial year to date).</a:t>
+              <a:t>Services · Training. February against February last year: (23.6%); Year to date (Jul to Feb 2026): $64,800; Gross margin, year to date: 77.0%. Training brought in $64,800 this financial year to date, at a 77.0% gross margin (above the 67.4% overall). Training: 77.0% gross margin, 37.0 points over the 40.0% target ($24,000 ahead on $64,800 this financial year to date).</a:t>
             </a:r>
           </a:p>
         </p:txBody>
@@ -1937,7 +1937,7 @@
           <a:lstStyle/>
           <a:p>
             <a:r>
-              <a:t>By type of work: financial year to date (Jul to Feb 2026) against the same period last year · Services. Same period last year: Not available: the data starts October 2024. From gross margin to profit: February's client work made $63,475 gross margin (63.4%). Consultant time not charged to client work took $5,270 and overheads $51,460, leaving $6,745 profit before tax (6.7% of revenue). To cover overheads, client work needs a 56.7% gross margin on average.</a:t>
+              <a:t>By type of work: financial year to date (Jul to Feb 2026) against the same period last year · Services. Same period last year: Not available: the data starts October 2024. From gross margin to profit: February's client work made $74,255 gross margin (67.0%). Consultant time not charged to client work took $12,120 and overheads $51,460, leaving $10,675 profit before tax (9.6% of revenue). To cover overheads, client work needs a 57.4% gross margin on average.</a:t>
             </a:r>
           </a:p>
         </p:txBody>
@@ -5352,7 +5352,7 @@
                 </a:solidFill>
                 <a:latin typeface="Roboto"/>
               </a:rPr>
-              <a:t>Data retrieved 2pm, Tue 6 Oct 2026 · Generated 8 Oct 2026, 9:35am · Sample data · Made with Python (python-pptx)</a:t>
+              <a:t>Data retrieved 2pm, Tue 6 Oct 2026 · Generated 9 Oct 2026, 8:41am · Sample data · Made with Python (python-pptx)</a:t>
             </a:r>
           </a:p>
         </p:txBody>
@@ -5698,7 +5698,7 @@
                 </a:solidFill>
                 <a:latin typeface="Roboto"/>
               </a:rPr>
-              <a:t>(9.9%)</a:t>
+              <a:t>(8.6%)</a:t>
             </a:r>
           </a:p>
         </p:txBody>
@@ -5737,7 +5737,7 @@
                 </a:solidFill>
                 <a:latin typeface="Roboto"/>
               </a:rPr>
-              <a:t>$100,055 against $111,010</a:t>
+              <a:t>$110,835 against $121,275</a:t>
             </a:r>
           </a:p>
         </p:txBody>
@@ -5864,7 +5864,7 @@
                 </a:solidFill>
                 <a:latin typeface="Roboto"/>
               </a:rPr>
-              <a:t>$624,375</a:t>
+              <a:t>$689,110</a:t>
             </a:r>
           </a:p>
         </p:txBody>
@@ -6030,7 +6030,7 @@
                 </a:solidFill>
                 <a:latin typeface="Roboto"/>
               </a:rPr>
-              <a:t>64.0%</a:t>
+              <a:t>67.4%</a:t>
             </a:r>
           </a:p>
         </p:txBody>
@@ -6069,7 +6069,7 @@
                 </a:solidFill>
                 <a:latin typeface="Roboto"/>
               </a:rPr>
-              <a:t>$399,615 before overheads</a:t>
+              <a:t>$464,350 before overheads</a:t>
             </a:r>
           </a:p>
         </p:txBody>
@@ -6214,7 +6214,7 @@
                 </a:solidFill>
                 <a:latin typeface="Roboto"/>
               </a:rPr>
-              <a:t>Revenue is $624,375 this financial year to date (Jul to Feb 2026). Training makes the highest gross margin (74.8%); Projects the lowest (61.6%). The business needs 56.7% gross margin just to cover overheads.</a:t>
+              <a:t>Revenue is $689,110 this financial year to date (Jul to Feb 2026). Training makes the highest gross margin (77.0%); Projects the lowest (65.3%). The business needs 57.4% gross margin just to cover overheads.</a:t>
             </a:r>
           </a:p>
         </p:txBody>
@@ -6341,7 +6341,7 @@
                 </a:solidFill>
                 <a:latin typeface="Roboto"/>
               </a:rPr>
-              <a:t>Projects: 61.6% gross margin, 21.6 points over the 40.0% target ($83,445 ahead on $386,975 this financial year to date). Training: 74.8% gross margin, 34.8 points over the 40.0% target ($20,520 ahead on $59,000 this financial year to date).</a:t>
+              <a:t>Projects: 65.3% gross margin, 25.3 points over the 40.0% target ($108,246 ahead on $428,310 this financial year to date). Training: 77.0% gross margin, 37.0 points over the 40.0% target ($24,000 ahead on $64,800 this financial year to date).</a:t>
             </a:r>
           </a:p>
         </p:txBody>
@@ -6419,7 +6419,7 @@
                 </a:solidFill>
                 <a:latin typeface="Roboto"/>
               </a:rPr>
-              <a:t>Data retrieved 2pm, Tue 6 Oct 2026 · Generated 8 Oct 2026, 9:35am · Sample data · Made with Python (python-pptx)</a:t>
+              <a:t>Data retrieved 2pm, Tue 6 Oct 2026 · Generated 9 Oct 2026, 8:41am · Sample data · Made with Python (python-pptx)</a:t>
             </a:r>
           </a:p>
         </p:txBody>
@@ -6765,7 +6765,7 @@
                 </a:solidFill>
                 <a:latin typeface="Roboto"/>
               </a:rPr>
-              <a:t>(25.4%)</a:t>
+              <a:t>(23.9%)</a:t>
             </a:r>
           </a:p>
         </p:txBody>
@@ -6804,7 +6804,7 @@
                 </a:solidFill>
                 <a:latin typeface="Roboto"/>
               </a:rPr>
-              <a:t>$62,955 against $84,410</a:t>
+              <a:t>$70,035 against $92,075</a:t>
             </a:r>
           </a:p>
         </p:txBody>
@@ -6931,7 +6931,7 @@
                 </a:solidFill>
                 <a:latin typeface="Roboto"/>
               </a:rPr>
-              <a:t>$386,975</a:t>
+              <a:t>$428,310</a:t>
             </a:r>
           </a:p>
         </p:txBody>
@@ -7097,7 +7097,7 @@
                 </a:solidFill>
                 <a:latin typeface="Roboto"/>
               </a:rPr>
-              <a:t>61.6%</a:t>
+              <a:t>65.3%</a:t>
             </a:r>
           </a:p>
         </p:txBody>
@@ -7136,7 +7136,7 @@
                 </a:solidFill>
                 <a:latin typeface="Roboto"/>
               </a:rPr>
-              <a:t>$238,235 before overheads</a:t>
+              <a:t>$279,570 before overheads</a:t>
             </a:r>
           </a:p>
         </p:txBody>
@@ -7281,7 +7281,7 @@
                 </a:solidFill>
                 <a:latin typeface="Roboto"/>
               </a:rPr>
-              <a:t>Projects brought in $386,975 this financial year to date, at a 61.6% gross margin (below the 64.0% overall).</a:t>
+              <a:t>Projects brought in $428,310 this financial year to date, at a 65.3% gross margin (below the 67.4% overall).</a:t>
             </a:r>
           </a:p>
         </p:txBody>
@@ -7408,7 +7408,7 @@
                 </a:solidFill>
                 <a:latin typeface="Roboto"/>
               </a:rPr>
-              <a:t>Projects: 61.6% gross margin, 21.6 points over the 40.0% target ($83,445 ahead on $386,975 this financial year to date).</a:t>
+              <a:t>Projects: 65.3% gross margin, 25.3 points over the 40.0% target ($108,246 ahead on $428,310 this financial year to date).</a:t>
             </a:r>
           </a:p>
         </p:txBody>
@@ -7486,7 +7486,7 @@
                 </a:solidFill>
                 <a:latin typeface="Roboto"/>
               </a:rPr>
-              <a:t>Data retrieved 2pm, Tue 6 Oct 2026 · Generated 8 Oct 2026, 9:35am · Sample data · Made with Python (python-pptx)</a:t>
+              <a:t>Data retrieved 2pm, Tue 6 Oct 2026 · Generated 9 Oct 2026, 8:41am · Sample data · Made with Python (python-pptx)</a:t>
             </a:r>
           </a:p>
         </p:txBody>
@@ -7832,7 +7832,7 @@
                 </a:solidFill>
                 <a:latin typeface="Roboto"/>
               </a:rPr>
-              <a:t>88.7%</a:t>
+              <a:t>88.5%</a:t>
             </a:r>
           </a:p>
         </p:txBody>
@@ -7871,7 +7871,7 @@
                 </a:solidFill>
                 <a:latin typeface="Roboto"/>
               </a:rPr>
-              <a:t>$28,300 against $15,000</a:t>
+              <a:t>$31,100 against $16,500</a:t>
             </a:r>
           </a:p>
         </p:txBody>
@@ -7998,7 +7998,7 @@
                 </a:solidFill>
                 <a:latin typeface="Roboto"/>
               </a:rPr>
-              <a:t>$178,400</a:t>
+              <a:t>$196,000</a:t>
             </a:r>
           </a:p>
         </p:txBody>
@@ -8164,7 +8164,7 @@
                 </a:solidFill>
                 <a:latin typeface="Roboto"/>
               </a:rPr>
-              <a:t>65.7%</a:t>
+              <a:t>68.8%</a:t>
             </a:r>
           </a:p>
         </p:txBody>
@@ -8203,7 +8203,7 @@
                 </a:solidFill>
                 <a:latin typeface="Roboto"/>
               </a:rPr>
-              <a:t>$117,260 before overheads</a:t>
+              <a:t>$134,860 before overheads</a:t>
             </a:r>
           </a:p>
         </p:txBody>
@@ -8348,7 +8348,7 @@
                 </a:solidFill>
                 <a:latin typeface="Roboto"/>
               </a:rPr>
-              <a:t>Retainers brought in $178,400 this financial year to date, at a 65.7% gross margin (above the 64.0% overall).</a:t>
+              <a:t>Retainers brought in $196,000 this financial year to date, at a 68.8% gross margin (above the 67.4% overall).</a:t>
             </a:r>
           </a:p>
         </p:txBody>
@@ -8475,7 +8475,7 @@
                 </a:solidFill>
                 <a:latin typeface="Roboto"/>
               </a:rPr>
-              <a:t>Retainers: 65.7% gross margin, 25.7 points over the 40.0% target ($45,900 ahead on $178,400 this financial year to date).</a:t>
+              <a:t>Retainers: 68.8% gross margin, 28.8 points over the 40.0% target ($56,460 ahead on $196,000 this financial year to date).</a:t>
             </a:r>
           </a:p>
         </p:txBody>
@@ -8553,7 +8553,7 @@
                 </a:solidFill>
                 <a:latin typeface="Roboto"/>
               </a:rPr>
-              <a:t>Data retrieved 2pm, Tue 6 Oct 2026 · Generated 8 Oct 2026, 9:35am · Sample data · Made with Python (python-pptx)</a:t>
+              <a:t>Data retrieved 2pm, Tue 6 Oct 2026 · Generated 9 Oct 2026, 8:41am · Sample data · Made with Python (python-pptx)</a:t>
             </a:r>
           </a:p>
         </p:txBody>
@@ -8899,7 +8899,7 @@
                 </a:solidFill>
                 <a:latin typeface="Roboto"/>
               </a:rPr>
-              <a:t>(24.1%)</a:t>
+              <a:t>(23.6%)</a:t>
             </a:r>
           </a:p>
         </p:txBody>
@@ -8938,7 +8938,7 @@
                 </a:solidFill>
                 <a:latin typeface="Roboto"/>
               </a:rPr>
-              <a:t>$8,800 against $11,600</a:t>
+              <a:t>$9,700 against $12,700</a:t>
             </a:r>
           </a:p>
         </p:txBody>
@@ -9065,7 +9065,7 @@
                 </a:solidFill>
                 <a:latin typeface="Roboto"/>
               </a:rPr>
-              <a:t>$59,000</a:t>
+              <a:t>$64,800</a:t>
             </a:r>
           </a:p>
         </p:txBody>
@@ -9231,7 +9231,7 @@
                 </a:solidFill>
                 <a:latin typeface="Roboto"/>
               </a:rPr>
-              <a:t>74.8%</a:t>
+              <a:t>77.0%</a:t>
             </a:r>
           </a:p>
         </p:txBody>
@@ -9270,7 +9270,7 @@
                 </a:solidFill>
                 <a:latin typeface="Roboto"/>
               </a:rPr>
-              <a:t>$44,120 before overheads</a:t>
+              <a:t>$49,920 before overheads</a:t>
             </a:r>
           </a:p>
         </p:txBody>
@@ -9415,7 +9415,7 @@
                 </a:solidFill>
                 <a:latin typeface="Roboto"/>
               </a:rPr>
-              <a:t>Training brought in $59,000 this financial year to date, at a 74.8% gross margin (above the 64.0% overall).</a:t>
+              <a:t>Training brought in $64,800 this financial year to date, at a 77.0% gross margin (above the 67.4% overall).</a:t>
             </a:r>
           </a:p>
         </p:txBody>
@@ -9542,7 +9542,7 @@
                 </a:solidFill>
                 <a:latin typeface="Roboto"/>
               </a:rPr>
-              <a:t>Training: 74.8% gross margin, 34.8 points over the 40.0% target ($20,520 ahead on $59,000 this financial year to date).</a:t>
+              <a:t>Training: 77.0% gross margin, 37.0 points over the 40.0% target ($24,000 ahead on $64,800 this financial year to date).</a:t>
             </a:r>
           </a:p>
         </p:txBody>
@@ -9620,7 +9620,7 @@
                 </a:solidFill>
                 <a:latin typeface="Roboto"/>
               </a:rPr>
-              <a:t>Data retrieved 2pm, Tue 6 Oct 2026 · Generated 8 Oct 2026, 9:35am · Sample data · Made with Python (python-pptx)</a:t>
+              <a:t>Data retrieved 2pm, Tue 6 Oct 2026 · Generated 9 Oct 2026, 8:41am · Sample data · Made with Python (python-pptx)</a:t>
             </a:r>
           </a:p>
         </p:txBody>
@@ -9839,7 +9839,7 @@
                 </a:solidFill>
                 <a:latin typeface="Roboto"/>
               </a:rPr>
-              <a:t>Same period last year: Not available: the data starts October 2024. From gross margin to profit: February's client work made $63,475 gross margin (63.4%). Consultant time not charged to client work took $5,270 and overheads $51,460, leaving $6,745 profit before tax (6.7% of revenue). To cover overheads, client work needs a 56.7% gross margin on average.</a:t>
+              <a:t>Same period last year: Not available: the data starts October 2024. From gross margin to profit: February's client work made $74,255 gross margin (67.0%). Consultant time not charged to client work took $12,120 and overheads $51,460, leaving $10,675 profit before tax (9.6% of revenue). To cover overheads, client work needs a 57.4% gross margin on average.</a:t>
             </a:r>
           </a:p>
         </p:txBody>
@@ -10070,7 +10070,7 @@
                           </a:solidFill>
                           <a:latin typeface="Roboto"/>
                         </a:rPr>
-                        <a:t>$386,975</a:t>
+                        <a:t>$428,310</a:t>
                       </a:r>
                     </a:p>
                   </a:txBody>
@@ -10151,7 +10151,7 @@
                           </a:solidFill>
                           <a:latin typeface="Roboto"/>
                         </a:rPr>
-                        <a:t>$238,235</a:t>
+                        <a:t>$279,570</a:t>
                       </a:r>
                     </a:p>
                   </a:txBody>
@@ -10178,7 +10178,7 @@
                           </a:solidFill>
                           <a:latin typeface="Roboto"/>
                         </a:rPr>
-                        <a:t>61.6%</a:t>
+                        <a:t>65.3%</a:t>
                       </a:r>
                     </a:p>
                   </a:txBody>
@@ -10234,7 +10234,7 @@
                           </a:solidFill>
                           <a:latin typeface="Roboto"/>
                         </a:rPr>
-                        <a:t>$178,400</a:t>
+                        <a:t>$196,000</a:t>
                       </a:r>
                     </a:p>
                   </a:txBody>
@@ -10315,7 +10315,7 @@
                           </a:solidFill>
                           <a:latin typeface="Roboto"/>
                         </a:rPr>
-                        <a:t>$117,260</a:t>
+                        <a:t>$134,860</a:t>
                       </a:r>
                     </a:p>
                   </a:txBody>
@@ -10342,7 +10342,7 @@
                           </a:solidFill>
                           <a:latin typeface="Roboto"/>
                         </a:rPr>
-                        <a:t>65.7%</a:t>
+                        <a:t>68.8%</a:t>
                       </a:r>
                     </a:p>
                   </a:txBody>
@@ -10398,7 +10398,7 @@
                           </a:solidFill>
                           <a:latin typeface="Roboto"/>
                         </a:rPr>
-                        <a:t>$59,000</a:t>
+                        <a:t>$64,800</a:t>
                       </a:r>
                     </a:p>
                   </a:txBody>
@@ -10479,7 +10479,7 @@
                           </a:solidFill>
                           <a:latin typeface="Roboto"/>
                         </a:rPr>
-                        <a:t>$44,120</a:t>
+                        <a:t>$49,920</a:t>
                       </a:r>
                     </a:p>
                   </a:txBody>
@@ -10506,7 +10506,7 @@
                           </a:solidFill>
                           <a:latin typeface="Roboto"/>
                         </a:rPr>
-                        <a:t>74.8%</a:t>
+                        <a:t>77.0%</a:t>
                       </a:r>
                     </a:p>
                   </a:txBody>
@@ -10562,7 +10562,7 @@
                           </a:solidFill>
                           <a:latin typeface="Roboto"/>
                         </a:rPr>
-                        <a:t>$624,375</a:t>
+                        <a:t>$689,110</a:t>
                       </a:r>
                     </a:p>
                   </a:txBody>
@@ -10643,7 +10643,7 @@
                           </a:solidFill>
                           <a:latin typeface="Roboto"/>
                         </a:rPr>
-                        <a:t>$399,615</a:t>
+                        <a:t>$464,350</a:t>
                       </a:r>
                     </a:p>
                   </a:txBody>
@@ -10670,7 +10670,7 @@
                           </a:solidFill>
                           <a:latin typeface="Roboto"/>
                         </a:rPr>
-                        <a:t>64.0%</a:t>
+                        <a:t>67.4%</a:t>
                       </a:r>
                     </a:p>
                   </a:txBody>
@@ -10758,7 +10758,7 @@
                 </a:solidFill>
                 <a:latin typeface="Roboto"/>
               </a:rPr>
-              <a:t>Data retrieved 2pm, Tue 6 Oct 2026 · Generated 8 Oct 2026, 9:35am · Sample data · Made with Python (python-pptx)</a:t>
+              <a:t>Data retrieved 2pm, Tue 6 Oct 2026 · Generated 9 Oct 2026, 8:41am · Sample data · Made with Python (python-pptx)</a:t>
             </a:r>
           </a:p>
         </p:txBody>
